--- a/docs/webinars/03-admin-accounts-and-access.pptx
+++ b/docs/webinars/03-admin-accounts-and-access.pptx
@@ -687,7 +687,7 @@
           <a:p>
             <a:r>
               <a:rPr lang="en-US" dirty="0"/>
-              <a:t>Small audience session usually — whoever runs operations. Clarify scope up front: investor logins are a different system, covered in the investor-platform webinar.</a:t>
+              <a:t>Small audience session usually: whoever runs operations. Clarify scope up front: investor logins are a different system, covered in the investor-platform webinar.</a:t>
             </a:r>
             <a:endParaRPr lang="en-US" dirty="0"/>
           </a:p>
@@ -775,7 +775,7 @@
           <a:p>
             <a:r>
               <a:rPr lang="en-US" dirty="0"/>
-              <a:t>The distinction prevents the most common support confusion: resetting the wrong kind of account. If someone says “I can't get in”, first ask: which door — /admin or /investors?</a:t>
+              <a:t>The distinction prevents the most common support confusion: resetting the wrong kind of account. If someone says “I can't get in”, first ask: which door, /admin or /investors?</a:t>
             </a:r>
             <a:endParaRPr lang="en-US" dirty="0"/>
           </a:p>
@@ -863,7 +863,7 @@
           <a:p>
             <a:r>
               <a:rPr lang="en-US" dirty="0"/>
-              <a:t>Two ideas here: the hosting is the source of truth (so a compromised website can't mint accounts), and hashing (so nobody — including us — can read a password). Both come up in support conversations.</a:t>
+              <a:t>Two ideas here: the hosting is the source of truth (so a compromised website can't mint accounts), and hashing (so nobody, including us, can read a password). Both come up in support conversations.</a:t>
             </a:r>
             <a:endParaRPr lang="en-US" dirty="0"/>
           </a:p>
@@ -951,7 +951,7 @@
           <a:p>
             <a:r>
               <a:rPr lang="en-US" dirty="0"/>
-              <a:t>The result box shows the password a single time — have a password manager or a secure note ready before clicking. If the page instead says the site is running on demo credentials (test/test), creating this first real account is exactly how you fix that.</a:t>
+              <a:t>The result box shows the password a single time. Have a password manager or a secure note ready before clicking. If the page instead says the site is running on demo credentials (test/test), creating this first real account is exactly how you fix that.</a:t>
             </a:r>
             <a:endParaRPr lang="en-US" dirty="0"/>
           </a:p>
@@ -1039,7 +1039,7 @@
           <a:p>
             <a:r>
               <a:rPr lang="en-US" dirty="0"/>
-              <a:t>The redeploy is the step people forget — the new account simply won't work until it happens. The handover rule matters: if one email thread carries both the address and the password, one compromised inbox is a compromised admin.</a:t>
+              <a:t>The redeploy is the step people forget. The new account simply won't work until it happens. The handover rule matters: if one email thread carries both the address and the password, one compromised inbox is a compromised admin.</a:t>
             </a:r>
             <a:endParaRPr lang="en-US" dirty="0"/>
           </a:p>
@@ -1127,7 +1127,7 @@
           <a:p>
             <a:r>
               <a:rPr lang="en-US" dirty="0"/>
-              <a:t>Same mechanics in both columns: the env var is the account list, and a redeploy applies it. Point out the immediacy of removal — useful when someone leaves the business.</a:t>
+              <a:t>Same mechanics in both columns: the env var is the account list, and a redeploy applies it. Point out the immediacy of removal. Useful when someone leaves the business.</a:t>
             </a:r>
             <a:endParaRPr lang="en-US" dirty="0"/>
           </a:p>
@@ -1215,7 +1215,7 @@
           <a:p>
             <a:r>
               <a:rPr lang="en-US" dirty="0"/>
-              <a:t>These three cover essentially every admin sign-in complaint. The 15-minute throttle applies per internet connection — an office may share one, so one person's typos can pause everyone briefly.</a:t>
+              <a:t>These three cover essentially every admin sign-in complaint. The 15-minute throttle applies per internet connection. An office may share one, so one person's typos can pause everyone briefly.</a:t>
             </a:r>
             <a:endParaRPr lang="en-US" dirty="0"/>
           </a:p>
@@ -1303,7 +1303,7 @@
           <a:p>
             <a:r>
               <a:rPr lang="en-US" dirty="0"/>
-              <a:t>Only relevant until first-time setup is done — but worth one slide because the warning banner is the first thing anyone sees on a fresh deployment, and the fix is exactly the session's main flow.</a:t>
+              <a:t>Only relevant until first-time setup is done, but worth one slide because the warning banner is the first thing anyone sees on a fresh deployment, and the fix is exactly the session's main flow.</a:t>
             </a:r>
             <a:endParaRPr lang="en-US" dirty="0"/>
           </a:p>
@@ -1778,7 +1778,7 @@
                 <a:ea typeface="Work Sans" pitchFamily="34" charset="-122"/>
                 <a:cs typeface="Work Sans" pitchFamily="34" charset="-120"/>
               </a:rPr>
-              <a:t>SATIS GROUP — BACKEND WEBINAR SERIES</a:t>
+              <a:t>SATIS GROUP · BACKEND WEBINAR SERIES</a:t>
             </a:r>
             <a:endParaRPr lang="en-US" sz="950" dirty="0"/>
           </a:p>
@@ -2187,7 +2187,7 @@
                 <a:ea typeface="Work Sans" pitchFamily="34" charset="-122"/>
                 <a:cs typeface="Work Sans" pitchFamily="34" charset="-120"/>
               </a:rPr>
-              <a:t>SATIS GROUP — ADMIN ACCOUNTS &amp; ACCESS</a:t>
+              <a:t>SATIS GROUP · ADMIN ACCOUNTS &amp; ACCESS</a:t>
             </a:r>
             <a:endParaRPr lang="en-US" sz="700" dirty="0"/>
           </a:p>
@@ -2311,7 +2311,7 @@
                 <a:ea typeface="Work Sans" pitchFamily="34" charset="-122"/>
                 <a:cs typeface="Work Sans" pitchFamily="34" charset="-120"/>
               </a:rPr>
-              <a:t>Admin and investor accounts are separate systems — check which door before helping anyone.</a:t>
+              <a:t>Admin and investor accounts are separate systems. Check which door before helping anyone.</a:t>
             </a:r>
             <a:endParaRPr lang="en-US" sz="1250" dirty="0"/>
           </a:p>
@@ -2383,7 +2383,7 @@
                 <a:ea typeface="Work Sans" pitchFamily="34" charset="-122"/>
                 <a:cs typeface="Work Sans" pitchFamily="34" charset="-120"/>
               </a:rPr>
-              <a:t>Passwords are shown once and stored scrambled — replaced, never recovered.</a:t>
+              <a:t>Passwords are shown once and stored scrambled: replaced, never recovered.</a:t>
             </a:r>
             <a:endParaRPr lang="en-US" sz="1250" dirty="0"/>
           </a:p>
@@ -2842,7 +2842,7 @@
                 <a:ea typeface="Work Sans" pitchFamily="34" charset="-122"/>
                 <a:cs typeface="Work Sans" pitchFamily="34" charset="-120"/>
               </a:rPr>
-              <a:t>SATIS GROUP — ADMIN ACCOUNTS &amp; ACCESS</a:t>
+              <a:t>SATIS GROUP · ADMIN ACCOUNTS &amp; ACCESS</a:t>
             </a:r>
             <a:endParaRPr lang="en-US" sz="700" dirty="0"/>
           </a:p>
@@ -2962,7 +2962,7 @@
                 <a:ea typeface="Work Sans" pitchFamily="34" charset="-122"/>
                 <a:cs typeface="Work Sans" pitchFamily="34" charset="-120"/>
               </a:rPr>
-              <a:t>You need the new admin's email address, and access to the Vercel project settings — or someone who has it.</a:t>
+              <a:t>You need the new admin's email address, and access to the Vercel project settings, or someone who has it.</a:t>
             </a:r>
             <a:endParaRPr lang="en-US" sz="1150" dirty="0"/>
           </a:p>
@@ -3082,7 +3082,7 @@
                 <a:ea typeface="Work Sans" pitchFamily="34" charset="-122"/>
                 <a:cs typeface="Work Sans" pitchFamily="34" charset="-120"/>
               </a:rPr>
-              <a:t>Admin accounts vs investor accounts — different doors, different keys.</a:t>
+              <a:t>Admin accounts vs investor accounts: different doors, different keys.</a:t>
             </a:r>
             <a:endParaRPr lang="en-US" sz="950" dirty="0"/>
           </a:p>
@@ -3202,7 +3202,7 @@
                 <a:ea typeface="Work Sans" pitchFamily="34" charset="-122"/>
                 <a:cs typeface="Work Sans" pitchFamily="34" charset="-120"/>
               </a:rPr>
-              <a:t>In the hosting platform, not on the website — and why.</a:t>
+              <a:t>In the hosting platform, not on the website, and why.</a:t>
             </a:r>
             <a:endParaRPr lang="en-US" sz="950" dirty="0"/>
           </a:p>
@@ -3687,7 +3687,7 @@
                 <a:ea typeface="Work Sans" pitchFamily="34" charset="-122"/>
                 <a:cs typeface="Work Sans" pitchFamily="34" charset="-120"/>
               </a:rPr>
-              <a:t>Adding an account takes about ten minutes including the hosting step — and the page does the fiddly part for you.</a:t>
+              <a:t>Adding an account takes about ten minutes including the hosting step, and the page does the fiddly part for you.</a:t>
             </a:r>
             <a:endParaRPr lang="en-US" sz="1100" dirty="0"/>
           </a:p>
@@ -3891,7 +3891,7 @@
                 <a:ea typeface="Work Sans" pitchFamily="34" charset="-122"/>
                 <a:cs typeface="Work Sans" pitchFamily="34" charset="-120"/>
               </a:rPr>
-              <a:t>SATIS GROUP — ADMIN ACCOUNTS &amp; ACCESS</a:t>
+              <a:t>SATIS GROUP · ADMIN ACCOUNTS &amp; ACCESS</a:t>
             </a:r>
             <a:endParaRPr lang="en-US" sz="700" dirty="0"/>
           </a:p>
@@ -4081,7 +4081,7 @@
                 <a:ea typeface="Work Sans" pitchFamily="34" charset="-122"/>
                 <a:cs typeface="Work Sans" pitchFamily="34" charset="-120"/>
               </a:rPr>
-              <a:t>Admin accounts — the back office
+              <a:t>Admin accounts: the back office
 </a:t>
             </a:r>
             <a:pPr indent="0" marL="0">
@@ -4165,7 +4165,7 @@
                 <a:ea typeface="Work Sans" pitchFamily="34" charset="-122"/>
                 <a:cs typeface="Work Sans" pitchFamily="34" charset="-120"/>
               </a:rPr>
-              <a:t>Every admin has identical access — there are no roles or permission levels.</a:t>
+              <a:t>Every admin has identical access. There are no roles or permission levels.</a:t>
             </a:r>
             <a:endParaRPr lang="en-US" sz="1100" dirty="0"/>
           </a:p>
@@ -4235,7 +4235,7 @@
                 <a:ea typeface="Work Sans" pitchFamily="34" charset="-122"/>
                 <a:cs typeface="Work Sans" pitchFamily="34" charset="-120"/>
               </a:rPr>
-              <a:t>Investor accounts — the portal
+              <a:t>Investor accounts: the portal
 </a:t>
             </a:r>
             <a:pPr indent="0" marL="0">
@@ -4277,7 +4277,7 @@
                 <a:ea typeface="Work Sans" pitchFamily="34" charset="-122"/>
                 <a:cs typeface="Work Sans" pitchFamily="34" charset="-120"/>
               </a:rPr>
-              <a:t>See their own portfolio, reports and documents — never the admin area.
+              <a:t>See their own portfolio, reports and documents, never the admin area.
 </a:t>
             </a:r>
             <a:pPr indent="0" marL="0">
@@ -4319,7 +4319,7 @@
                 <a:ea typeface="Work Sans" pitchFamily="34" charset="-122"/>
                 <a:cs typeface="Work Sans" pitchFamily="34" charset="-120"/>
               </a:rPr>
-              <a:t>Covered in webinar 04 — The investor platform.</a:t>
+              <a:t>Covered in webinar 04, The investor platform.</a:t>
             </a:r>
             <a:endParaRPr lang="en-US" sz="1100" dirty="0"/>
           </a:p>
@@ -4523,7 +4523,7 @@
                 <a:ea typeface="Work Sans" pitchFamily="34" charset="-122"/>
                 <a:cs typeface="Work Sans" pitchFamily="34" charset="-120"/>
               </a:rPr>
-              <a:t>SATIS GROUP — ADMIN ACCOUNTS &amp; ACCESS</a:t>
+              <a:t>SATIS GROUP · ADMIN ACCOUNTS &amp; ACCESS</a:t>
             </a:r>
             <a:endParaRPr lang="en-US" sz="700" dirty="0"/>
           </a:p>
@@ -4601,7 +4601,7 @@
                 <a:ea typeface="Work Sans" pitchFamily="34" charset="-122"/>
                 <a:cs typeface="Work Sans" pitchFamily="34" charset="-120"/>
               </a:rPr>
-              <a:t>Admin accounts live with the hosting — deliberately.</a:t>
+              <a:t>Admin accounts live with the hosting. Deliberately.</a:t>
             </a:r>
             <a:endParaRPr lang="en-US" sz="2500" dirty="0"/>
           </a:p>
@@ -4803,7 +4803,7 @@
                 <a:ea typeface="Work Sans" pitchFamily="34" charset="-122"/>
                 <a:cs typeface="Work Sans" pitchFamily="34" charset="-120"/>
               </a:rPr>
-              <a:t>Vercel — Environment Variables</a:t>
+              <a:t>Vercel: Environment Variables</a:t>
             </a:r>
             <a:pPr algn="ctr" indent="0" marL="0">
               <a:lnSpc>
@@ -5090,7 +5090,7 @@
                 <a:ea typeface="Work Sans" pitchFamily="34" charset="-122"/>
                 <a:cs typeface="Work Sans" pitchFamily="34" charset="-120"/>
               </a:rPr>
-              <a:t>Passwords are stored “hashed” — one-way scrambled.  </a:t>
+              <a:t>Passwords are stored “hashed”: one-way scrambled.  </a:t>
             </a:r>
             <a:pPr indent="0" marL="0">
               <a:lnSpc>
@@ -5171,7 +5171,7 @@
                 <a:ea typeface="Work Sans" pitchFamily="34" charset="-122"/>
                 <a:cs typeface="Work Sans" pitchFamily="34" charset="-120"/>
               </a:rPr>
-              <a:t>ADDING AN ADMIN — STEP 1 OF 2</a:t>
+              <a:t>ADDING AN ADMIN · STEP 1 OF 2</a:t>
             </a:r>
             <a:endParaRPr lang="en-US" sz="950" dirty="0"/>
           </a:p>
@@ -5311,7 +5311,7 @@
                 <a:ea typeface="Work Sans" pitchFamily="34" charset="-122"/>
                 <a:cs typeface="Work Sans" pitchFamily="34" charset="-120"/>
               </a:rPr>
-              <a:t>SATIS GROUP — ADMIN ACCOUNTS &amp; ACCESS</a:t>
+              <a:t>SATIS GROUP · ADMIN ACCOUNTS &amp; ACCESS</a:t>
             </a:r>
             <a:endParaRPr lang="en-US" sz="700" dirty="0"/>
           </a:p>
@@ -5757,7 +5757,7 @@
                 <a:ea typeface="Work Sans" pitchFamily="34" charset="-122"/>
                 <a:cs typeface="Work Sans" pitchFamily="34" charset="-120"/>
               </a:rPr>
-              <a:t>Password — leave it blank</a:t>
+              <a:t>Password: leave it blank</a:t>
             </a:r>
             <a:endParaRPr lang="en-US" sz="1200" dirty="0"/>
           </a:p>
@@ -5939,7 +5939,7 @@
                 <a:ea typeface="Work Sans" pitchFamily="34" charset="-122"/>
                 <a:cs typeface="Work Sans" pitchFamily="34" charset="-120"/>
               </a:rPr>
-              <a:t>Nothing changes yet — this only prepares the value for Vercel.</a:t>
+              <a:t>Nothing changes yet. This only prepares the value for Vercel.</a:t>
             </a:r>
             <a:endParaRPr lang="en-US" sz="1050" dirty="0"/>
           </a:p>
@@ -6064,7 +6064,7 @@
                 <a:ea typeface="Work Sans" pitchFamily="34" charset="-122"/>
                 <a:cs typeface="Work Sans" pitchFamily="34" charset="-120"/>
               </a:rPr>
-              <a:t>Record it before leaving the page. It is stored only as a one-way hash and can never be read back — only replaced.</a:t>
+              <a:t>Record it before leaving the page. It is stored only as a one-way hash and can never be read back, only replaced.</a:t>
             </a:r>
             <a:endParaRPr lang="en-US" sz="1100" dirty="0"/>
           </a:p>
@@ -6128,7 +6128,7 @@
                 <a:ea typeface="Work Sans" pitchFamily="34" charset="-122"/>
                 <a:cs typeface="Work Sans" pitchFamily="34" charset="-120"/>
               </a:rPr>
-              <a:t>ADDING AN ADMIN — STEP 2 OF 2</a:t>
+              <a:t>ADDING AN ADMIN · STEP 2 OF 2</a:t>
             </a:r>
             <a:endParaRPr lang="en-US" sz="950" dirty="0"/>
           </a:p>
@@ -6268,7 +6268,7 @@
                 <a:ea typeface="Work Sans" pitchFamily="34" charset="-122"/>
                 <a:cs typeface="Work Sans" pitchFamily="34" charset="-120"/>
               </a:rPr>
-              <a:t>SATIS GROUP — ADMIN ACCOUNTS &amp; ACCESS</a:t>
+              <a:t>SATIS GROUP · ADMIN ACCOUNTS &amp; ACCESS</a:t>
             </a:r>
             <a:endParaRPr lang="en-US" sz="700" dirty="0"/>
           </a:p>
@@ -6388,7 +6388,7 @@
                 <a:ea typeface="Work Sans" pitchFamily="34" charset="-122"/>
                 <a:cs typeface="Work Sans" pitchFamily="34" charset="-120"/>
               </a:rPr>
-              <a:t>The result box shows the complete new SATIS_ADMIN_USERS value — it includes every existing account too, so pasting it wholesale keeps everyone working. The box lists the exact clicks:</a:t>
+              <a:t>The result box shows the complete new SATIS_ADMIN_USERS value. It includes every existing account as well, so pasting it wholesale keeps everyone working. The box lists the exact clicks:</a:t>
             </a:r>
             <a:endParaRPr lang="en-US" sz="1150" dirty="0"/>
           </a:p>
@@ -6959,7 +6959,7 @@
                 <a:ea typeface="Work Sans" pitchFamily="34" charset="-122"/>
                 <a:cs typeface="Work Sans" pitchFamily="34" charset="-120"/>
               </a:rPr>
-              <a:t>Tell them their password over a trusted channel — phone, or split across two channels. Never both credentials in one email.</a:t>
+              <a:t>Tell them their password over a trusted channel: phone, or split across two channels. Never both credentials in one email.</a:t>
             </a:r>
             <a:endParaRPr lang="en-US" sz="1100" dirty="0"/>
           </a:p>
@@ -7163,7 +7163,7 @@
                 <a:ea typeface="Work Sans" pitchFamily="34" charset="-122"/>
                 <a:cs typeface="Work Sans" pitchFamily="34" charset="-120"/>
               </a:rPr>
-              <a:t>SATIS GROUP — ADMIN ACCOUNTS &amp; ACCESS</a:t>
+              <a:t>SATIS GROUP · ADMIN ACCOUNTS &amp; ACCESS</a:t>
             </a:r>
             <a:endParaRPr lang="en-US" sz="700" dirty="0"/>
           </a:p>
@@ -7350,7 +7350,7 @@
                 <a:ea typeface="Work Sans" pitchFamily="34" charset="-122"/>
                 <a:cs typeface="Work Sans" pitchFamily="34" charset="-120"/>
               </a:rPr>
-              <a:t>Generate a new entry for the same email — re-using an existing email produces a replacement entry.</a:t>
+              <a:t>Generate a new entry for the same email. Re-using an existing email produces a replacement entry.</a:t>
             </a:r>
             <a:endParaRPr lang="en-US" sz="1050" dirty="0"/>
           </a:p>
@@ -7559,7 +7559,7 @@
                 <a:ea typeface="Work Sans" pitchFamily="34" charset="-122"/>
                 <a:cs typeface="Work Sans" pitchFamily="34" charset="-120"/>
               </a:rPr>
-              <a:t>Redeploy. Removal takes effect on the next request — no waiting for their session to expire.</a:t>
+              <a:t>Redeploy. Removal takes effect on the next request. No waiting for their session to expire.</a:t>
             </a:r>
             <a:endParaRPr lang="en-US" sz="1050" dirty="0"/>
           </a:p>
@@ -7888,7 +7888,7 @@
                 <a:ea typeface="Work Sans" pitchFamily="34" charset="-122"/>
                 <a:cs typeface="Work Sans" pitchFamily="34" charset="-120"/>
               </a:rPr>
-              <a:t>SATIS GROUP — ADMIN ACCOUNTS &amp; ACCESS</a:t>
+              <a:t>SATIS GROUP · ADMIN ACCOUNTS &amp; ACCESS</a:t>
             </a:r>
             <a:endParaRPr lang="en-US" sz="700" dirty="0"/>
           </a:p>
@@ -8148,7 +8148,7 @@
                 <a:ea typeface="Work Sans" pitchFamily="34" charset="-122"/>
                 <a:cs typeface="Work Sans" pitchFamily="34" charset="-120"/>
               </a:rPr>
-              <a:t>Five wrong tries pauses that internet connection for 15 minutes — deliberate, to stop password guessing. Wait it out; nothing is broken. Genuinely forgotten? Reset it meanwhile.</a:t>
+              <a:t>Five wrong tries pauses that internet connection for 15 minutes. Deliberate, to stop password guessing. Wait it out; nothing is broken. Genuinely forgotten? Reset it meanwhile.</a:t>
             </a:r>
             <a:endParaRPr lang="en-US" sz="1100" dirty="0"/>
           </a:p>
@@ -8239,7 +8239,7 @@
                 <a:ea typeface="Work Sans" pitchFamily="34" charset="-122"/>
                 <a:cs typeface="Work Sans" pitchFamily="34" charset="-120"/>
               </a:rPr>
-              <a:t>Sessions last 24 hours, then quietly expire — normal, and protective on shared devices. Sign in again; nothing saved is lost. On shared computers, always press Sign out when done.</a:t>
+              <a:t>Sessions last 24 hours, then quietly expire. Normal, and protective on shared devices. Sign in again; nothing saved is lost. On shared computers, always press Sign out when done.</a:t>
             </a:r>
             <a:endParaRPr lang="en-US" sz="1100" dirty="0"/>
           </a:p>
@@ -8443,7 +8443,7 @@
                 <a:ea typeface="Work Sans" pitchFamily="34" charset="-122"/>
                 <a:cs typeface="Work Sans" pitchFamily="34" charset="-120"/>
               </a:rPr>
-              <a:t>SATIS GROUP — ADMIN ACCOUNTS &amp; ACCESS</a:t>
+              <a:t>SATIS GROUP · ADMIN ACCOUNTS &amp; ACCESS</a:t>
             </a:r>
             <a:endParaRPr lang="en-US" sz="700" dirty="0"/>
           </a:p>
@@ -8703,7 +8703,7 @@
                 <a:ea typeface="Work Sans" pitchFamily="34" charset="-122"/>
                 <a:cs typeface="Work Sans" pitchFamily="34" charset="-120"/>
               </a:rPr>
-              <a:t>Follow the two-step add flow from this session — that is the fix, not a separate procedure.</a:t>
+              <a:t>Follow the two-step add flow from this session. That is the fix, not a separate procedure.</a:t>
             </a:r>
             <a:endParaRPr lang="en-US" sz="1050" dirty="0"/>
           </a:p>
